--- a/applications/fid/documents/fid_ppt.pptx
+++ b/applications/fid/documents/fid_ppt.pptx
@@ -6831,14 +6831,14 @@
           <a:p>
             <a:pPr>
               <a:lnSpc>
-                <a:spcPts val="2100"/>
+                <a:spcPts val="2700"/>
               </a:lnSpc>
               <a:spcAft>
-                <a:spcPts val="700"/>
-              </a:spcAft>
-            </a:pPr>
-            <a:r>
-              <a:rPr sz="1700">
+                <a:spcPts val="900"/>
+              </a:spcAft>
+            </a:pPr>
+            <a:r>
+              <a:rPr sz="2200">
                 <a:solidFill>
                   <a:srgbClr val="1E2F38"/>
                 </a:solidFill>
@@ -6850,14 +6850,14 @@
           <a:p>
             <a:pPr>
               <a:lnSpc>
-                <a:spcPts val="2100"/>
+                <a:spcPts val="2700"/>
               </a:lnSpc>
               <a:spcAft>
-                <a:spcPts val="700"/>
-              </a:spcAft>
-            </a:pPr>
-            <a:r>
-              <a:rPr sz="1700">
+                <a:spcPts val="900"/>
+              </a:spcAft>
+            </a:pPr>
+            <a:r>
+              <a:rPr sz="2200">
                 <a:solidFill>
                   <a:srgbClr val="1E2F38"/>
                 </a:solidFill>
@@ -6869,14 +6869,14 @@
           <a:p>
             <a:pPr>
               <a:lnSpc>
-                <a:spcPts val="2100"/>
+                <a:spcPts val="2700"/>
               </a:lnSpc>
               <a:spcAft>
-                <a:spcPts val="700"/>
-              </a:spcAft>
-            </a:pPr>
-            <a:r>
-              <a:rPr sz="1700">
+                <a:spcPts val="900"/>
+              </a:spcAft>
+            </a:pPr>
+            <a:r>
+              <a:rPr sz="2200">
                 <a:solidFill>
                   <a:srgbClr val="1E2F38"/>
                 </a:solidFill>
@@ -6888,14 +6888,14 @@
           <a:p>
             <a:pPr>
               <a:lnSpc>
-                <a:spcPts val="2100"/>
+                <a:spcPts val="2700"/>
               </a:lnSpc>
               <a:spcAft>
-                <a:spcPts val="700"/>
-              </a:spcAft>
-            </a:pPr>
-            <a:r>
-              <a:rPr sz="1700">
+                <a:spcPts val="900"/>
+              </a:spcAft>
+            </a:pPr>
+            <a:r>
+              <a:rPr sz="2200">
                 <a:solidFill>
                   <a:srgbClr val="1E2F38"/>
                 </a:solidFill>
@@ -6907,14 +6907,14 @@
           <a:p>
             <a:pPr>
               <a:lnSpc>
-                <a:spcPts val="2100"/>
+                <a:spcPts val="2700"/>
               </a:lnSpc>
               <a:spcAft>
-                <a:spcPts val="700"/>
-              </a:spcAft>
-            </a:pPr>
-            <a:r>
-              <a:rPr sz="1700">
+                <a:spcPts val="900"/>
+              </a:spcAft>
+            </a:pPr>
+            <a:r>
+              <a:rPr sz="2200">
                 <a:solidFill>
                   <a:srgbClr val="1E2F38"/>
                 </a:solidFill>
@@ -10465,14 +10465,14 @@
           <a:p>
             <a:pPr>
               <a:lnSpc>
-                <a:spcPts val="1700"/>
+                <a:spcPts val="2200"/>
               </a:lnSpc>
               <a:spcAft>
-                <a:spcPts val="600"/>
-              </a:spcAft>
-            </a:pPr>
-            <a:r>
-              <a:rPr sz="1400">
+                <a:spcPts val="800"/>
+              </a:spcAft>
+            </a:pPr>
+            <a:r>
+              <a:rPr sz="1800">
                 <a:solidFill>
                   <a:srgbClr val="1E2F38"/>
                 </a:solidFill>
@@ -10484,14 +10484,14 @@
           <a:p>
             <a:pPr>
               <a:lnSpc>
-                <a:spcPts val="1700"/>
+                <a:spcPts val="2200"/>
               </a:lnSpc>
               <a:spcAft>
-                <a:spcPts val="600"/>
-              </a:spcAft>
-            </a:pPr>
-            <a:r>
-              <a:rPr sz="1400">
+                <a:spcPts val="800"/>
+              </a:spcAft>
+            </a:pPr>
+            <a:r>
+              <a:rPr sz="1800">
                 <a:solidFill>
                   <a:srgbClr val="1E2F38"/>
                 </a:solidFill>
@@ -10503,14 +10503,14 @@
           <a:p>
             <a:pPr>
               <a:lnSpc>
-                <a:spcPts val="1700"/>
+                <a:spcPts val="2200"/>
               </a:lnSpc>
               <a:spcAft>
-                <a:spcPts val="600"/>
-              </a:spcAft>
-            </a:pPr>
-            <a:r>
-              <a:rPr sz="1400">
+                <a:spcPts val="800"/>
+              </a:spcAft>
+            </a:pPr>
+            <a:r>
+              <a:rPr sz="1800">
                 <a:solidFill>
                   <a:srgbClr val="1E2F38"/>
                 </a:solidFill>
@@ -10522,14 +10522,14 @@
           <a:p>
             <a:pPr>
               <a:lnSpc>
-                <a:spcPts val="1700"/>
+                <a:spcPts val="2200"/>
               </a:lnSpc>
               <a:spcAft>
-                <a:spcPts val="600"/>
-              </a:spcAft>
-            </a:pPr>
-            <a:r>
-              <a:rPr sz="1400">
+                <a:spcPts val="800"/>
+              </a:spcAft>
+            </a:pPr>
+            <a:r>
+              <a:rPr sz="1800">
                 <a:solidFill>
                   <a:srgbClr val="1E2F38"/>
                 </a:solidFill>
@@ -10882,14 +10882,14 @@
           <a:p>
             <a:pPr>
               <a:lnSpc>
-                <a:spcPts val="1800"/>
+                <a:spcPts val="2200"/>
               </a:lnSpc>
               <a:spcAft>
-                <a:spcPts val="600"/>
-              </a:spcAft>
-            </a:pPr>
-            <a:r>
-              <a:rPr sz="1500">
+                <a:spcPts val="800"/>
+              </a:spcAft>
+            </a:pPr>
+            <a:r>
+              <a:rPr sz="1800">
                 <a:solidFill>
                   <a:srgbClr val="1E2F38"/>
                 </a:solidFill>
@@ -10901,14 +10901,14 @@
           <a:p>
             <a:pPr>
               <a:lnSpc>
-                <a:spcPts val="1800"/>
+                <a:spcPts val="2200"/>
               </a:lnSpc>
               <a:spcAft>
-                <a:spcPts val="600"/>
-              </a:spcAft>
-            </a:pPr>
-            <a:r>
-              <a:rPr sz="1500">
+                <a:spcPts val="800"/>
+              </a:spcAft>
+            </a:pPr>
+            <a:r>
+              <a:rPr sz="1800">
                 <a:solidFill>
                   <a:srgbClr val="1E2F38"/>
                 </a:solidFill>
@@ -10920,14 +10920,14 @@
           <a:p>
             <a:pPr>
               <a:lnSpc>
-                <a:spcPts val="1800"/>
+                <a:spcPts val="2200"/>
               </a:lnSpc>
               <a:spcAft>
-                <a:spcPts val="600"/>
-              </a:spcAft>
-            </a:pPr>
-            <a:r>
-              <a:rPr sz="1500">
+                <a:spcPts val="800"/>
+              </a:spcAft>
+            </a:pPr>
+            <a:r>
+              <a:rPr sz="1800">
                 <a:solidFill>
                   <a:srgbClr val="1E2F38"/>
                 </a:solidFill>
@@ -10939,14 +10939,14 @@
           <a:p>
             <a:pPr>
               <a:lnSpc>
-                <a:spcPts val="1800"/>
+                <a:spcPts val="2200"/>
               </a:lnSpc>
               <a:spcAft>
-                <a:spcPts val="600"/>
-              </a:spcAft>
-            </a:pPr>
-            <a:r>
-              <a:rPr sz="1500">
+                <a:spcPts val="800"/>
+              </a:spcAft>
+            </a:pPr>
+            <a:r>
+              <a:rPr sz="1800">
                 <a:solidFill>
                   <a:srgbClr val="1E2F38"/>
                 </a:solidFill>
@@ -11347,14 +11347,14 @@
           <a:p>
             <a:pPr>
               <a:lnSpc>
-                <a:spcPts val="1800"/>
+                <a:spcPts val="2200"/>
               </a:lnSpc>
               <a:spcAft>
-                <a:spcPts val="600"/>
-              </a:spcAft>
-            </a:pPr>
-            <a:r>
-              <a:rPr sz="1500">
+                <a:spcPts val="800"/>
+              </a:spcAft>
+            </a:pPr>
+            <a:r>
+              <a:rPr sz="1800">
                 <a:solidFill>
                   <a:srgbClr val="1E2F38"/>
                 </a:solidFill>
@@ -11366,14 +11366,14 @@
           <a:p>
             <a:pPr>
               <a:lnSpc>
-                <a:spcPts val="1800"/>
+                <a:spcPts val="2200"/>
               </a:lnSpc>
               <a:spcAft>
-                <a:spcPts val="600"/>
-              </a:spcAft>
-            </a:pPr>
-            <a:r>
-              <a:rPr sz="1500">
+                <a:spcPts val="800"/>
+              </a:spcAft>
+            </a:pPr>
+            <a:r>
+              <a:rPr sz="1800">
                 <a:solidFill>
                   <a:srgbClr val="1E2F38"/>
                 </a:solidFill>
@@ -11385,14 +11385,14 @@
           <a:p>
             <a:pPr>
               <a:lnSpc>
-                <a:spcPts val="1800"/>
+                <a:spcPts val="2200"/>
               </a:lnSpc>
               <a:spcAft>
-                <a:spcPts val="600"/>
-              </a:spcAft>
-            </a:pPr>
-            <a:r>
-              <a:rPr sz="1500">
+                <a:spcPts val="800"/>
+              </a:spcAft>
+            </a:pPr>
+            <a:r>
+              <a:rPr sz="1800">
                 <a:solidFill>
                   <a:srgbClr val="1E2F38"/>
                 </a:solidFill>
@@ -11404,14 +11404,14 @@
           <a:p>
             <a:pPr>
               <a:lnSpc>
-                <a:spcPts val="1800"/>
+                <a:spcPts val="2200"/>
               </a:lnSpc>
               <a:spcAft>
-                <a:spcPts val="600"/>
-              </a:spcAft>
-            </a:pPr>
-            <a:r>
-              <a:rPr sz="1500">
+                <a:spcPts val="800"/>
+              </a:spcAft>
+            </a:pPr>
+            <a:r>
+              <a:rPr sz="1800">
                 <a:solidFill>
                   <a:srgbClr val="1E2F38"/>
                 </a:solidFill>
@@ -11788,14 +11788,14 @@
           <a:p>
             <a:pPr>
               <a:lnSpc>
-                <a:spcPts val="1700"/>
+                <a:spcPts val="2200"/>
               </a:lnSpc>
               <a:spcAft>
-                <a:spcPts val="600"/>
-              </a:spcAft>
-            </a:pPr>
-            <a:r>
-              <a:rPr sz="1400">
+                <a:spcPts val="800"/>
+              </a:spcAft>
+            </a:pPr>
+            <a:r>
+              <a:rPr sz="1800">
                 <a:solidFill>
                   <a:srgbClr val="1E2F38"/>
                 </a:solidFill>
@@ -11807,14 +11807,14 @@
           <a:p>
             <a:pPr>
               <a:lnSpc>
-                <a:spcPts val="1700"/>
+                <a:spcPts val="2200"/>
               </a:lnSpc>
               <a:spcAft>
-                <a:spcPts val="600"/>
-              </a:spcAft>
-            </a:pPr>
-            <a:r>
-              <a:rPr sz="1400">
+                <a:spcPts val="800"/>
+              </a:spcAft>
+            </a:pPr>
+            <a:r>
+              <a:rPr sz="1800">
                 <a:solidFill>
                   <a:srgbClr val="1E2F38"/>
                 </a:solidFill>
@@ -11826,14 +11826,14 @@
           <a:p>
             <a:pPr>
               <a:lnSpc>
-                <a:spcPts val="1700"/>
+                <a:spcPts val="2200"/>
               </a:lnSpc>
               <a:spcAft>
-                <a:spcPts val="600"/>
-              </a:spcAft>
-            </a:pPr>
-            <a:r>
-              <a:rPr sz="1400">
+                <a:spcPts val="800"/>
+              </a:spcAft>
+            </a:pPr>
+            <a:r>
+              <a:rPr sz="1800">
                 <a:solidFill>
                   <a:srgbClr val="1E2F38"/>
                 </a:solidFill>
@@ -11845,14 +11845,14 @@
           <a:p>
             <a:pPr>
               <a:lnSpc>
-                <a:spcPts val="1700"/>
+                <a:spcPts val="2200"/>
               </a:lnSpc>
               <a:spcAft>
-                <a:spcPts val="600"/>
-              </a:spcAft>
-            </a:pPr>
-            <a:r>
-              <a:rPr sz="1400">
+                <a:spcPts val="800"/>
+              </a:spcAft>
+            </a:pPr>
+            <a:r>
+              <a:rPr sz="1800">
                 <a:solidFill>
                   <a:srgbClr val="1E2F38"/>
                 </a:solidFill>
@@ -11864,14 +11864,14 @@
           <a:p>
             <a:pPr>
               <a:lnSpc>
-                <a:spcPts val="1700"/>
+                <a:spcPts val="2200"/>
               </a:lnSpc>
               <a:spcAft>
-                <a:spcPts val="600"/>
-              </a:spcAft>
-            </a:pPr>
-            <a:r>
-              <a:rPr sz="1400">
+                <a:spcPts val="800"/>
+              </a:spcAft>
+            </a:pPr>
+            <a:r>
+              <a:rPr sz="1800">
                 <a:solidFill>
                   <a:srgbClr val="1E2F38"/>
                 </a:solidFill>
@@ -11883,14 +11883,14 @@
           <a:p>
             <a:pPr>
               <a:lnSpc>
-                <a:spcPts val="1700"/>
+                <a:spcPts val="2200"/>
               </a:lnSpc>
               <a:spcAft>
-                <a:spcPts val="600"/>
-              </a:spcAft>
-            </a:pPr>
-            <a:r>
-              <a:rPr sz="1400">
+                <a:spcPts val="800"/>
+              </a:spcAft>
+            </a:pPr>
+            <a:r>
+              <a:rPr sz="1800">
                 <a:solidFill>
                   <a:srgbClr val="1E2F38"/>
                 </a:solidFill>

--- a/applications/fid/documents/fid_ppt.pptx
+++ b/applications/fid/documents/fid_ppt.pptx
@@ -3425,6 +3425,96 @@
   <p:clrMapOvr>
     <a:masterClrMapping/>
   </p:clrMapOvr>
+  <p:timing>
+    <p:tnLst>
+      <p:par>
+        <p:cTn id="1" dur="indefinite" restart="never" nodeType="tmRoot">
+          <p:childTnLst>
+            <p:seq concurrent="true" nextAc="seek">
+              <p:cTn id="2" dur="indefinite" nodeType="mainSeq">
+                <p:childTnLst>
+                  <p:par>
+                    <p:cTn id="9" fill="hold">
+                      <p:stCondLst>
+                        <p:cond delay="0"/>
+                      </p:stCondLst>
+                      <p:childTnLst>
+                        <p:par>
+                          <p:cTn id="3" presetID="10" presetClass="entr" presetSubtype="0" fill="hold" nodeType="withEffect">
+                            <p:stCondLst>
+                              <p:cond delay="0"/>
+                            </p:stCondLst>
+                            <p:childTnLst>
+                              <p:animEffect transition="in" filter="fade">
+                                <p:cBhvr>
+                                  <p:cTn id="4" dur="450"/>
+                                  <p:tgtEl>
+                                    <p:spTgt spid="2"/>
+                                  </p:tgtEl>
+                                </p:cBhvr>
+                              </p:animEffect>
+                            </p:childTnLst>
+                          </p:cTn>
+                        </p:par>
+                        <p:par>
+                          <p:cTn id="5" presetID="10" presetClass="entr" presetSubtype="0" fill="hold" nodeType="withEffect">
+                            <p:stCondLst>
+                              <p:cond delay="200"/>
+                            </p:stCondLst>
+                            <p:childTnLst>
+                              <p:animEffect transition="in" filter="fade">
+                                <p:cBhvr>
+                                  <p:cTn id="6" dur="450"/>
+                                  <p:tgtEl>
+                                    <p:spTgt spid="3"/>
+                                  </p:tgtEl>
+                                </p:cBhvr>
+                              </p:animEffect>
+                            </p:childTnLst>
+                          </p:cTn>
+                        </p:par>
+                        <p:par>
+                          <p:cTn id="7" presetID="10" presetClass="entr" presetSubtype="0" fill="hold" nodeType="withEffect">
+                            <p:stCondLst>
+                              <p:cond delay="200"/>
+                            </p:stCondLst>
+                            <p:childTnLst>
+                              <p:animEffect transition="in" filter="fade">
+                                <p:cBhvr>
+                                  <p:cTn id="8" dur="450"/>
+                                  <p:tgtEl>
+                                    <p:spTgt spid="4"/>
+                                  </p:tgtEl>
+                                </p:cBhvr>
+                              </p:animEffect>
+                            </p:childTnLst>
+                          </p:cTn>
+                        </p:par>
+                      </p:childTnLst>
+                    </p:cTn>
+                  </p:par>
+                </p:childTnLst>
+              </p:cTn>
+              <p:prevCondLst>
+                <p:cond evt="onPrev" delay="0">
+                  <p:tgtEl>
+                    <p:sldTgt/>
+                  </p:tgtEl>
+                </p:cond>
+              </p:prevCondLst>
+              <p:nextCondLst>
+                <p:cond evt="onNext" delay="0">
+                  <p:tgtEl>
+                    <p:sldTgt/>
+                  </p:tgtEl>
+                </p:cond>
+              </p:nextCondLst>
+            </p:seq>
+          </p:childTnLst>
+        </p:cTn>
+      </p:par>
+    </p:tnLst>
+  </p:timing>
 </p:sld>
 </file>
 
@@ -5303,6 +5393,96 @@
   <p:clrMapOvr>
     <a:masterClrMapping/>
   </p:clrMapOvr>
+  <p:timing>
+    <p:tnLst>
+      <p:par>
+        <p:cTn id="1" dur="indefinite" restart="never" nodeType="tmRoot">
+          <p:childTnLst>
+            <p:seq concurrent="true" nextAc="seek">
+              <p:cTn id="2" dur="indefinite" nodeType="mainSeq">
+                <p:childTnLst>
+                  <p:par>
+                    <p:cTn id="9" fill="hold">
+                      <p:stCondLst>
+                        <p:cond delay="0"/>
+                      </p:stCondLst>
+                      <p:childTnLst>
+                        <p:par>
+                          <p:cTn id="3" presetID="10" presetClass="entr" presetSubtype="0" fill="hold" nodeType="withEffect">
+                            <p:stCondLst>
+                              <p:cond delay="0"/>
+                            </p:stCondLst>
+                            <p:childTnLst>
+                              <p:animEffect transition="in" filter="fade">
+                                <p:cBhvr>
+                                  <p:cTn id="4" dur="450"/>
+                                  <p:tgtEl>
+                                    <p:spTgt spid="2"/>
+                                  </p:tgtEl>
+                                </p:cBhvr>
+                              </p:animEffect>
+                            </p:childTnLst>
+                          </p:cTn>
+                        </p:par>
+                        <p:par>
+                          <p:cTn id="5" presetID="10" presetClass="entr" presetSubtype="0" fill="hold" nodeType="withEffect">
+                            <p:stCondLst>
+                              <p:cond delay="200"/>
+                            </p:stCondLst>
+                            <p:childTnLst>
+                              <p:animEffect transition="in" filter="fade">
+                                <p:cBhvr>
+                                  <p:cTn id="6" dur="450"/>
+                                  <p:tgtEl>
+                                    <p:spTgt spid="3"/>
+                                  </p:tgtEl>
+                                </p:cBhvr>
+                              </p:animEffect>
+                            </p:childTnLst>
+                          </p:cTn>
+                        </p:par>
+                        <p:par>
+                          <p:cTn id="7" presetID="10" presetClass="entr" presetSubtype="0" fill="hold" nodeType="withEffect">
+                            <p:stCondLst>
+                              <p:cond delay="200"/>
+                            </p:stCondLst>
+                            <p:childTnLst>
+                              <p:animEffect transition="in" filter="fade">
+                                <p:cBhvr>
+                                  <p:cTn id="8" dur="450"/>
+                                  <p:tgtEl>
+                                    <p:spTgt spid="4"/>
+                                  </p:tgtEl>
+                                </p:cBhvr>
+                              </p:animEffect>
+                            </p:childTnLst>
+                          </p:cTn>
+                        </p:par>
+                      </p:childTnLst>
+                    </p:cTn>
+                  </p:par>
+                </p:childTnLst>
+              </p:cTn>
+              <p:prevCondLst>
+                <p:cond evt="onPrev" delay="0">
+                  <p:tgtEl>
+                    <p:sldTgt/>
+                  </p:tgtEl>
+                </p:cond>
+              </p:prevCondLst>
+              <p:nextCondLst>
+                <p:cond evt="onNext" delay="0">
+                  <p:tgtEl>
+                    <p:sldTgt/>
+                  </p:tgtEl>
+                </p:cond>
+              </p:nextCondLst>
+            </p:seq>
+          </p:childTnLst>
+        </p:cTn>
+      </p:par>
+    </p:tnLst>
+  </p:timing>
 </p:sld>
 </file>
 
@@ -6301,6 +6481,96 @@
   <p:clrMapOvr>
     <a:masterClrMapping/>
   </p:clrMapOvr>
+  <p:timing>
+    <p:tnLst>
+      <p:par>
+        <p:cTn id="1" dur="indefinite" restart="never" nodeType="tmRoot">
+          <p:childTnLst>
+            <p:seq concurrent="true" nextAc="seek">
+              <p:cTn id="2" dur="indefinite" nodeType="mainSeq">
+                <p:childTnLst>
+                  <p:par>
+                    <p:cTn id="9" fill="hold">
+                      <p:stCondLst>
+                        <p:cond delay="0"/>
+                      </p:stCondLst>
+                      <p:childTnLst>
+                        <p:par>
+                          <p:cTn id="3" presetID="10" presetClass="entr" presetSubtype="0" fill="hold" nodeType="withEffect">
+                            <p:stCondLst>
+                              <p:cond delay="0"/>
+                            </p:stCondLst>
+                            <p:childTnLst>
+                              <p:animEffect transition="in" filter="fade">
+                                <p:cBhvr>
+                                  <p:cTn id="4" dur="450"/>
+                                  <p:tgtEl>
+                                    <p:spTgt spid="2"/>
+                                  </p:tgtEl>
+                                </p:cBhvr>
+                              </p:animEffect>
+                            </p:childTnLst>
+                          </p:cTn>
+                        </p:par>
+                        <p:par>
+                          <p:cTn id="5" presetID="10" presetClass="entr" presetSubtype="0" fill="hold" nodeType="withEffect">
+                            <p:stCondLst>
+                              <p:cond delay="200"/>
+                            </p:stCondLst>
+                            <p:childTnLst>
+                              <p:animEffect transition="in" filter="fade">
+                                <p:cBhvr>
+                                  <p:cTn id="6" dur="450"/>
+                                  <p:tgtEl>
+                                    <p:spTgt spid="3"/>
+                                  </p:tgtEl>
+                                </p:cBhvr>
+                              </p:animEffect>
+                            </p:childTnLst>
+                          </p:cTn>
+                        </p:par>
+                        <p:par>
+                          <p:cTn id="7" presetID="10" presetClass="entr" presetSubtype="0" fill="hold" nodeType="withEffect">
+                            <p:stCondLst>
+                              <p:cond delay="200"/>
+                            </p:stCondLst>
+                            <p:childTnLst>
+                              <p:animEffect transition="in" filter="fade">
+                                <p:cBhvr>
+                                  <p:cTn id="8" dur="450"/>
+                                  <p:tgtEl>
+                                    <p:spTgt spid="4"/>
+                                  </p:tgtEl>
+                                </p:cBhvr>
+                              </p:animEffect>
+                            </p:childTnLst>
+                          </p:cTn>
+                        </p:par>
+                      </p:childTnLst>
+                    </p:cTn>
+                  </p:par>
+                </p:childTnLst>
+              </p:cTn>
+              <p:prevCondLst>
+                <p:cond evt="onPrev" delay="0">
+                  <p:tgtEl>
+                    <p:sldTgt/>
+                  </p:tgtEl>
+                </p:cond>
+              </p:prevCondLst>
+              <p:nextCondLst>
+                <p:cond evt="onNext" delay="0">
+                  <p:tgtEl>
+                    <p:sldTgt/>
+                  </p:tgtEl>
+                </p:cond>
+              </p:nextCondLst>
+            </p:seq>
+          </p:childTnLst>
+        </p:cTn>
+      </p:par>
+    </p:tnLst>
+  </p:timing>
 </p:sld>
 </file>
 
@@ -6598,6 +6868,96 @@
   <p:clrMapOvr>
     <a:masterClrMapping/>
   </p:clrMapOvr>
+  <p:timing>
+    <p:tnLst>
+      <p:par>
+        <p:cTn id="1" dur="indefinite" restart="never" nodeType="tmRoot">
+          <p:childTnLst>
+            <p:seq concurrent="true" nextAc="seek">
+              <p:cTn id="2" dur="indefinite" nodeType="mainSeq">
+                <p:childTnLst>
+                  <p:par>
+                    <p:cTn id="9" fill="hold">
+                      <p:stCondLst>
+                        <p:cond delay="0"/>
+                      </p:stCondLst>
+                      <p:childTnLst>
+                        <p:par>
+                          <p:cTn id="3" presetID="10" presetClass="entr" presetSubtype="0" fill="hold" nodeType="withEffect">
+                            <p:stCondLst>
+                              <p:cond delay="0"/>
+                            </p:stCondLst>
+                            <p:childTnLst>
+                              <p:animEffect transition="in" filter="fade">
+                                <p:cBhvr>
+                                  <p:cTn id="4" dur="450"/>
+                                  <p:tgtEl>
+                                    <p:spTgt spid="2"/>
+                                  </p:tgtEl>
+                                </p:cBhvr>
+                              </p:animEffect>
+                            </p:childTnLst>
+                          </p:cTn>
+                        </p:par>
+                        <p:par>
+                          <p:cTn id="5" presetID="10" presetClass="entr" presetSubtype="0" fill="hold" nodeType="withEffect">
+                            <p:stCondLst>
+                              <p:cond delay="200"/>
+                            </p:stCondLst>
+                            <p:childTnLst>
+                              <p:animEffect transition="in" filter="fade">
+                                <p:cBhvr>
+                                  <p:cTn id="6" dur="450"/>
+                                  <p:tgtEl>
+                                    <p:spTgt spid="3"/>
+                                  </p:tgtEl>
+                                </p:cBhvr>
+                              </p:animEffect>
+                            </p:childTnLst>
+                          </p:cTn>
+                        </p:par>
+                        <p:par>
+                          <p:cTn id="7" presetID="10" presetClass="entr" presetSubtype="0" fill="hold" nodeType="withEffect">
+                            <p:stCondLst>
+                              <p:cond delay="200"/>
+                            </p:stCondLst>
+                            <p:childTnLst>
+                              <p:animEffect transition="in" filter="fade">
+                                <p:cBhvr>
+                                  <p:cTn id="8" dur="450"/>
+                                  <p:tgtEl>
+                                    <p:spTgt spid="4"/>
+                                  </p:tgtEl>
+                                </p:cBhvr>
+                              </p:animEffect>
+                            </p:childTnLst>
+                          </p:cTn>
+                        </p:par>
+                      </p:childTnLst>
+                    </p:cTn>
+                  </p:par>
+                </p:childTnLst>
+              </p:cTn>
+              <p:prevCondLst>
+                <p:cond evt="onPrev" delay="0">
+                  <p:tgtEl>
+                    <p:sldTgt/>
+                  </p:tgtEl>
+                </p:cond>
+              </p:prevCondLst>
+              <p:nextCondLst>
+                <p:cond evt="onNext" delay="0">
+                  <p:tgtEl>
+                    <p:sldTgt/>
+                  </p:tgtEl>
+                </p:cond>
+              </p:nextCondLst>
+            </p:seq>
+          </p:childTnLst>
+        </p:cTn>
+      </p:par>
+    </p:tnLst>
+  </p:timing>
 </p:sld>
 </file>
 
@@ -7058,6 +7418,96 @@
   <p:clrMapOvr>
     <a:masterClrMapping/>
   </p:clrMapOvr>
+  <p:timing>
+    <p:tnLst>
+      <p:par>
+        <p:cTn id="1" dur="indefinite" restart="never" nodeType="tmRoot">
+          <p:childTnLst>
+            <p:seq concurrent="true" nextAc="seek">
+              <p:cTn id="2" dur="indefinite" nodeType="mainSeq">
+                <p:childTnLst>
+                  <p:par>
+                    <p:cTn id="9" fill="hold">
+                      <p:stCondLst>
+                        <p:cond delay="0"/>
+                      </p:stCondLst>
+                      <p:childTnLst>
+                        <p:par>
+                          <p:cTn id="3" presetID="10" presetClass="entr" presetSubtype="0" fill="hold" nodeType="withEffect">
+                            <p:stCondLst>
+                              <p:cond delay="0"/>
+                            </p:stCondLst>
+                            <p:childTnLst>
+                              <p:animEffect transition="in" filter="fade">
+                                <p:cBhvr>
+                                  <p:cTn id="4" dur="450"/>
+                                  <p:tgtEl>
+                                    <p:spTgt spid="2"/>
+                                  </p:tgtEl>
+                                </p:cBhvr>
+                              </p:animEffect>
+                            </p:childTnLst>
+                          </p:cTn>
+                        </p:par>
+                        <p:par>
+                          <p:cTn id="5" presetID="10" presetClass="entr" presetSubtype="0" fill="hold" nodeType="withEffect">
+                            <p:stCondLst>
+                              <p:cond delay="200"/>
+                            </p:stCondLst>
+                            <p:childTnLst>
+                              <p:animEffect transition="in" filter="fade">
+                                <p:cBhvr>
+                                  <p:cTn id="6" dur="450"/>
+                                  <p:tgtEl>
+                                    <p:spTgt spid="3"/>
+                                  </p:tgtEl>
+                                </p:cBhvr>
+                              </p:animEffect>
+                            </p:childTnLst>
+                          </p:cTn>
+                        </p:par>
+                        <p:par>
+                          <p:cTn id="7" presetID="10" presetClass="entr" presetSubtype="0" fill="hold" nodeType="withEffect">
+                            <p:stCondLst>
+                              <p:cond delay="200"/>
+                            </p:stCondLst>
+                            <p:childTnLst>
+                              <p:animEffect transition="in" filter="fade">
+                                <p:cBhvr>
+                                  <p:cTn id="8" dur="450"/>
+                                  <p:tgtEl>
+                                    <p:spTgt spid="4"/>
+                                  </p:tgtEl>
+                                </p:cBhvr>
+                              </p:animEffect>
+                            </p:childTnLst>
+                          </p:cTn>
+                        </p:par>
+                      </p:childTnLst>
+                    </p:cTn>
+                  </p:par>
+                </p:childTnLst>
+              </p:cTn>
+              <p:prevCondLst>
+                <p:cond evt="onPrev" delay="0">
+                  <p:tgtEl>
+                    <p:sldTgt/>
+                  </p:tgtEl>
+                </p:cond>
+              </p:prevCondLst>
+              <p:nextCondLst>
+                <p:cond evt="onNext" delay="0">
+                  <p:tgtEl>
+                    <p:sldTgt/>
+                  </p:tgtEl>
+                </p:cond>
+              </p:nextCondLst>
+            </p:seq>
+          </p:childTnLst>
+        </p:cTn>
+      </p:par>
+    </p:tnLst>
+  </p:timing>
 </p:sld>
 </file>
 
@@ -7922,6 +8372,96 @@
   <p:clrMapOvr>
     <a:masterClrMapping/>
   </p:clrMapOvr>
+  <p:timing>
+    <p:tnLst>
+      <p:par>
+        <p:cTn id="1" dur="indefinite" restart="never" nodeType="tmRoot">
+          <p:childTnLst>
+            <p:seq concurrent="true" nextAc="seek">
+              <p:cTn id="2" dur="indefinite" nodeType="mainSeq">
+                <p:childTnLst>
+                  <p:par>
+                    <p:cTn id="9" fill="hold">
+                      <p:stCondLst>
+                        <p:cond delay="0"/>
+                      </p:stCondLst>
+                      <p:childTnLst>
+                        <p:par>
+                          <p:cTn id="3" presetID="10" presetClass="entr" presetSubtype="0" fill="hold" nodeType="withEffect">
+                            <p:stCondLst>
+                              <p:cond delay="0"/>
+                            </p:stCondLst>
+                            <p:childTnLst>
+                              <p:animEffect transition="in" filter="fade">
+                                <p:cBhvr>
+                                  <p:cTn id="4" dur="450"/>
+                                  <p:tgtEl>
+                                    <p:spTgt spid="2"/>
+                                  </p:tgtEl>
+                                </p:cBhvr>
+                              </p:animEffect>
+                            </p:childTnLst>
+                          </p:cTn>
+                        </p:par>
+                        <p:par>
+                          <p:cTn id="5" presetID="10" presetClass="entr" presetSubtype="0" fill="hold" nodeType="withEffect">
+                            <p:stCondLst>
+                              <p:cond delay="200"/>
+                            </p:stCondLst>
+                            <p:childTnLst>
+                              <p:animEffect transition="in" filter="fade">
+                                <p:cBhvr>
+                                  <p:cTn id="6" dur="450"/>
+                                  <p:tgtEl>
+                                    <p:spTgt spid="3"/>
+                                  </p:tgtEl>
+                                </p:cBhvr>
+                              </p:animEffect>
+                            </p:childTnLst>
+                          </p:cTn>
+                        </p:par>
+                        <p:par>
+                          <p:cTn id="7" presetID="10" presetClass="entr" presetSubtype="0" fill="hold" nodeType="withEffect">
+                            <p:stCondLst>
+                              <p:cond delay="200"/>
+                            </p:stCondLst>
+                            <p:childTnLst>
+                              <p:animEffect transition="in" filter="fade">
+                                <p:cBhvr>
+                                  <p:cTn id="8" dur="450"/>
+                                  <p:tgtEl>
+                                    <p:spTgt spid="4"/>
+                                  </p:tgtEl>
+                                </p:cBhvr>
+                              </p:animEffect>
+                            </p:childTnLst>
+                          </p:cTn>
+                        </p:par>
+                      </p:childTnLst>
+                    </p:cTn>
+                  </p:par>
+                </p:childTnLst>
+              </p:cTn>
+              <p:prevCondLst>
+                <p:cond evt="onPrev" delay="0">
+                  <p:tgtEl>
+                    <p:sldTgt/>
+                  </p:tgtEl>
+                </p:cond>
+              </p:prevCondLst>
+              <p:nextCondLst>
+                <p:cond evt="onNext" delay="0">
+                  <p:tgtEl>
+                    <p:sldTgt/>
+                  </p:tgtEl>
+                </p:cond>
+              </p:nextCondLst>
+            </p:seq>
+          </p:childTnLst>
+        </p:cTn>
+      </p:par>
+    </p:tnLst>
+  </p:timing>
 </p:sld>
 </file>
 
@@ -9044,6 +9584,96 @@
   <p:clrMapOvr>
     <a:masterClrMapping/>
   </p:clrMapOvr>
+  <p:timing>
+    <p:tnLst>
+      <p:par>
+        <p:cTn id="1" dur="indefinite" restart="never" nodeType="tmRoot">
+          <p:childTnLst>
+            <p:seq concurrent="true" nextAc="seek">
+              <p:cTn id="2" dur="indefinite" nodeType="mainSeq">
+                <p:childTnLst>
+                  <p:par>
+                    <p:cTn id="9" fill="hold">
+                      <p:stCondLst>
+                        <p:cond delay="0"/>
+                      </p:stCondLst>
+                      <p:childTnLst>
+                        <p:par>
+                          <p:cTn id="3" presetID="10" presetClass="entr" presetSubtype="0" fill="hold" nodeType="withEffect">
+                            <p:stCondLst>
+                              <p:cond delay="0"/>
+                            </p:stCondLst>
+                            <p:childTnLst>
+                              <p:animEffect transition="in" filter="fade">
+                                <p:cBhvr>
+                                  <p:cTn id="4" dur="450"/>
+                                  <p:tgtEl>
+                                    <p:spTgt spid="2"/>
+                                  </p:tgtEl>
+                                </p:cBhvr>
+                              </p:animEffect>
+                            </p:childTnLst>
+                          </p:cTn>
+                        </p:par>
+                        <p:par>
+                          <p:cTn id="5" presetID="10" presetClass="entr" presetSubtype="0" fill="hold" nodeType="withEffect">
+                            <p:stCondLst>
+                              <p:cond delay="200"/>
+                            </p:stCondLst>
+                            <p:childTnLst>
+                              <p:animEffect transition="in" filter="fade">
+                                <p:cBhvr>
+                                  <p:cTn id="6" dur="450"/>
+                                  <p:tgtEl>
+                                    <p:spTgt spid="3"/>
+                                  </p:tgtEl>
+                                </p:cBhvr>
+                              </p:animEffect>
+                            </p:childTnLst>
+                          </p:cTn>
+                        </p:par>
+                        <p:par>
+                          <p:cTn id="7" presetID="10" presetClass="entr" presetSubtype="0" fill="hold" nodeType="withEffect">
+                            <p:stCondLst>
+                              <p:cond delay="200"/>
+                            </p:stCondLst>
+                            <p:childTnLst>
+                              <p:animEffect transition="in" filter="fade">
+                                <p:cBhvr>
+                                  <p:cTn id="8" dur="450"/>
+                                  <p:tgtEl>
+                                    <p:spTgt spid="4"/>
+                                  </p:tgtEl>
+                                </p:cBhvr>
+                              </p:animEffect>
+                            </p:childTnLst>
+                          </p:cTn>
+                        </p:par>
+                      </p:childTnLst>
+                    </p:cTn>
+                  </p:par>
+                </p:childTnLst>
+              </p:cTn>
+              <p:prevCondLst>
+                <p:cond evt="onPrev" delay="0">
+                  <p:tgtEl>
+                    <p:sldTgt/>
+                  </p:tgtEl>
+                </p:cond>
+              </p:prevCondLst>
+              <p:nextCondLst>
+                <p:cond evt="onNext" delay="0">
+                  <p:tgtEl>
+                    <p:sldTgt/>
+                  </p:tgtEl>
+                </p:cond>
+              </p:nextCondLst>
+            </p:seq>
+          </p:childTnLst>
+        </p:cTn>
+      </p:par>
+    </p:tnLst>
+  </p:timing>
 </p:sld>
 </file>
 
@@ -10232,6 +10862,96 @@
   <p:clrMapOvr>
     <a:masterClrMapping/>
   </p:clrMapOvr>
+  <p:timing>
+    <p:tnLst>
+      <p:par>
+        <p:cTn id="1" dur="indefinite" restart="never" nodeType="tmRoot">
+          <p:childTnLst>
+            <p:seq concurrent="true" nextAc="seek">
+              <p:cTn id="2" dur="indefinite" nodeType="mainSeq">
+                <p:childTnLst>
+                  <p:par>
+                    <p:cTn id="9" fill="hold">
+                      <p:stCondLst>
+                        <p:cond delay="0"/>
+                      </p:stCondLst>
+                      <p:childTnLst>
+                        <p:par>
+                          <p:cTn id="3" presetID="10" presetClass="entr" presetSubtype="0" fill="hold" nodeType="withEffect">
+                            <p:stCondLst>
+                              <p:cond delay="0"/>
+                            </p:stCondLst>
+                            <p:childTnLst>
+                              <p:animEffect transition="in" filter="fade">
+                                <p:cBhvr>
+                                  <p:cTn id="4" dur="450"/>
+                                  <p:tgtEl>
+                                    <p:spTgt spid="2"/>
+                                  </p:tgtEl>
+                                </p:cBhvr>
+                              </p:animEffect>
+                            </p:childTnLst>
+                          </p:cTn>
+                        </p:par>
+                        <p:par>
+                          <p:cTn id="5" presetID="10" presetClass="entr" presetSubtype="0" fill="hold" nodeType="withEffect">
+                            <p:stCondLst>
+                              <p:cond delay="200"/>
+                            </p:stCondLst>
+                            <p:childTnLst>
+                              <p:animEffect transition="in" filter="fade">
+                                <p:cBhvr>
+                                  <p:cTn id="6" dur="450"/>
+                                  <p:tgtEl>
+                                    <p:spTgt spid="3"/>
+                                  </p:tgtEl>
+                                </p:cBhvr>
+                              </p:animEffect>
+                            </p:childTnLst>
+                          </p:cTn>
+                        </p:par>
+                        <p:par>
+                          <p:cTn id="7" presetID="10" presetClass="entr" presetSubtype="0" fill="hold" nodeType="withEffect">
+                            <p:stCondLst>
+                              <p:cond delay="200"/>
+                            </p:stCondLst>
+                            <p:childTnLst>
+                              <p:animEffect transition="in" filter="fade">
+                                <p:cBhvr>
+                                  <p:cTn id="8" dur="450"/>
+                                  <p:tgtEl>
+                                    <p:spTgt spid="4"/>
+                                  </p:tgtEl>
+                                </p:cBhvr>
+                              </p:animEffect>
+                            </p:childTnLst>
+                          </p:cTn>
+                        </p:par>
+                      </p:childTnLst>
+                    </p:cTn>
+                  </p:par>
+                </p:childTnLst>
+              </p:cTn>
+              <p:prevCondLst>
+                <p:cond evt="onPrev" delay="0">
+                  <p:tgtEl>
+                    <p:sldTgt/>
+                  </p:tgtEl>
+                </p:cond>
+              </p:prevCondLst>
+              <p:nextCondLst>
+                <p:cond evt="onNext" delay="0">
+                  <p:tgtEl>
+                    <p:sldTgt/>
+                  </p:tgtEl>
+                </p:cond>
+              </p:nextCondLst>
+            </p:seq>
+          </p:childTnLst>
+        </p:cTn>
+      </p:par>
+    </p:tnLst>
+  </p:timing>
 </p:sld>
 </file>
 
@@ -10673,6 +11393,96 @@
   <p:clrMapOvr>
     <a:masterClrMapping/>
   </p:clrMapOvr>
+  <p:timing>
+    <p:tnLst>
+      <p:par>
+        <p:cTn id="1" dur="indefinite" restart="never" nodeType="tmRoot">
+          <p:childTnLst>
+            <p:seq concurrent="true" nextAc="seek">
+              <p:cTn id="2" dur="indefinite" nodeType="mainSeq">
+                <p:childTnLst>
+                  <p:par>
+                    <p:cTn id="9" fill="hold">
+                      <p:stCondLst>
+                        <p:cond delay="0"/>
+                      </p:stCondLst>
+                      <p:childTnLst>
+                        <p:par>
+                          <p:cTn id="3" presetID="10" presetClass="entr" presetSubtype="0" fill="hold" nodeType="withEffect">
+                            <p:stCondLst>
+                              <p:cond delay="0"/>
+                            </p:stCondLst>
+                            <p:childTnLst>
+                              <p:animEffect transition="in" filter="fade">
+                                <p:cBhvr>
+                                  <p:cTn id="4" dur="450"/>
+                                  <p:tgtEl>
+                                    <p:spTgt spid="2"/>
+                                  </p:tgtEl>
+                                </p:cBhvr>
+                              </p:animEffect>
+                            </p:childTnLst>
+                          </p:cTn>
+                        </p:par>
+                        <p:par>
+                          <p:cTn id="5" presetID="10" presetClass="entr" presetSubtype="0" fill="hold" nodeType="withEffect">
+                            <p:stCondLst>
+                              <p:cond delay="200"/>
+                            </p:stCondLst>
+                            <p:childTnLst>
+                              <p:animEffect transition="in" filter="fade">
+                                <p:cBhvr>
+                                  <p:cTn id="6" dur="450"/>
+                                  <p:tgtEl>
+                                    <p:spTgt spid="3"/>
+                                  </p:tgtEl>
+                                </p:cBhvr>
+                              </p:animEffect>
+                            </p:childTnLst>
+                          </p:cTn>
+                        </p:par>
+                        <p:par>
+                          <p:cTn id="7" presetID="10" presetClass="entr" presetSubtype="0" fill="hold" nodeType="withEffect">
+                            <p:stCondLst>
+                              <p:cond delay="200"/>
+                            </p:stCondLst>
+                            <p:childTnLst>
+                              <p:animEffect transition="in" filter="fade">
+                                <p:cBhvr>
+                                  <p:cTn id="8" dur="450"/>
+                                  <p:tgtEl>
+                                    <p:spTgt spid="4"/>
+                                  </p:tgtEl>
+                                </p:cBhvr>
+                              </p:animEffect>
+                            </p:childTnLst>
+                          </p:cTn>
+                        </p:par>
+                      </p:childTnLst>
+                    </p:cTn>
+                  </p:par>
+                </p:childTnLst>
+              </p:cTn>
+              <p:prevCondLst>
+                <p:cond evt="onPrev" delay="0">
+                  <p:tgtEl>
+                    <p:sldTgt/>
+                  </p:tgtEl>
+                </p:cond>
+              </p:prevCondLst>
+              <p:nextCondLst>
+                <p:cond evt="onNext" delay="0">
+                  <p:tgtEl>
+                    <p:sldTgt/>
+                  </p:tgtEl>
+                </p:cond>
+              </p:nextCondLst>
+            </p:seq>
+          </p:childTnLst>
+        </p:cTn>
+      </p:par>
+    </p:tnLst>
+  </p:timing>
 </p:sld>
 </file>
 
@@ -11114,6 +11924,96 @@
   <p:clrMapOvr>
     <a:masterClrMapping/>
   </p:clrMapOvr>
+  <p:timing>
+    <p:tnLst>
+      <p:par>
+        <p:cTn id="1" dur="indefinite" restart="never" nodeType="tmRoot">
+          <p:childTnLst>
+            <p:seq concurrent="true" nextAc="seek">
+              <p:cTn id="2" dur="indefinite" nodeType="mainSeq">
+                <p:childTnLst>
+                  <p:par>
+                    <p:cTn id="9" fill="hold">
+                      <p:stCondLst>
+                        <p:cond delay="0"/>
+                      </p:stCondLst>
+                      <p:childTnLst>
+                        <p:par>
+                          <p:cTn id="3" presetID="10" presetClass="entr" presetSubtype="0" fill="hold" nodeType="withEffect">
+                            <p:stCondLst>
+                              <p:cond delay="0"/>
+                            </p:stCondLst>
+                            <p:childTnLst>
+                              <p:animEffect transition="in" filter="fade">
+                                <p:cBhvr>
+                                  <p:cTn id="4" dur="450"/>
+                                  <p:tgtEl>
+                                    <p:spTgt spid="2"/>
+                                  </p:tgtEl>
+                                </p:cBhvr>
+                              </p:animEffect>
+                            </p:childTnLst>
+                          </p:cTn>
+                        </p:par>
+                        <p:par>
+                          <p:cTn id="5" presetID="10" presetClass="entr" presetSubtype="0" fill="hold" nodeType="withEffect">
+                            <p:stCondLst>
+                              <p:cond delay="200"/>
+                            </p:stCondLst>
+                            <p:childTnLst>
+                              <p:animEffect transition="in" filter="fade">
+                                <p:cBhvr>
+                                  <p:cTn id="6" dur="450"/>
+                                  <p:tgtEl>
+                                    <p:spTgt spid="3"/>
+                                  </p:tgtEl>
+                                </p:cBhvr>
+                              </p:animEffect>
+                            </p:childTnLst>
+                          </p:cTn>
+                        </p:par>
+                        <p:par>
+                          <p:cTn id="7" presetID="10" presetClass="entr" presetSubtype="0" fill="hold" nodeType="withEffect">
+                            <p:stCondLst>
+                              <p:cond delay="200"/>
+                            </p:stCondLst>
+                            <p:childTnLst>
+                              <p:animEffect transition="in" filter="fade">
+                                <p:cBhvr>
+                                  <p:cTn id="8" dur="450"/>
+                                  <p:tgtEl>
+                                    <p:spTgt spid="4"/>
+                                  </p:tgtEl>
+                                </p:cBhvr>
+                              </p:animEffect>
+                            </p:childTnLst>
+                          </p:cTn>
+                        </p:par>
+                      </p:childTnLst>
+                    </p:cTn>
+                  </p:par>
+                </p:childTnLst>
+              </p:cTn>
+              <p:prevCondLst>
+                <p:cond evt="onPrev" delay="0">
+                  <p:tgtEl>
+                    <p:sldTgt/>
+                  </p:tgtEl>
+                </p:cond>
+              </p:prevCondLst>
+              <p:nextCondLst>
+                <p:cond evt="onNext" delay="0">
+                  <p:tgtEl>
+                    <p:sldTgt/>
+                  </p:tgtEl>
+                </p:cond>
+              </p:nextCondLst>
+            </p:seq>
+          </p:childTnLst>
+        </p:cTn>
+      </p:par>
+    </p:tnLst>
+  </p:timing>
 </p:sld>
 </file>
 
@@ -11555,6 +12455,96 @@
   <p:clrMapOvr>
     <a:masterClrMapping/>
   </p:clrMapOvr>
+  <p:timing>
+    <p:tnLst>
+      <p:par>
+        <p:cTn id="1" dur="indefinite" restart="never" nodeType="tmRoot">
+          <p:childTnLst>
+            <p:seq concurrent="true" nextAc="seek">
+              <p:cTn id="2" dur="indefinite" nodeType="mainSeq">
+                <p:childTnLst>
+                  <p:par>
+                    <p:cTn id="9" fill="hold">
+                      <p:stCondLst>
+                        <p:cond delay="0"/>
+                      </p:stCondLst>
+                      <p:childTnLst>
+                        <p:par>
+                          <p:cTn id="3" presetID="10" presetClass="entr" presetSubtype="0" fill="hold" nodeType="withEffect">
+                            <p:stCondLst>
+                              <p:cond delay="0"/>
+                            </p:stCondLst>
+                            <p:childTnLst>
+                              <p:animEffect transition="in" filter="fade">
+                                <p:cBhvr>
+                                  <p:cTn id="4" dur="450"/>
+                                  <p:tgtEl>
+                                    <p:spTgt spid="2"/>
+                                  </p:tgtEl>
+                                </p:cBhvr>
+                              </p:animEffect>
+                            </p:childTnLst>
+                          </p:cTn>
+                        </p:par>
+                        <p:par>
+                          <p:cTn id="5" presetID="10" presetClass="entr" presetSubtype="0" fill="hold" nodeType="withEffect">
+                            <p:stCondLst>
+                              <p:cond delay="200"/>
+                            </p:stCondLst>
+                            <p:childTnLst>
+                              <p:animEffect transition="in" filter="fade">
+                                <p:cBhvr>
+                                  <p:cTn id="6" dur="450"/>
+                                  <p:tgtEl>
+                                    <p:spTgt spid="3"/>
+                                  </p:tgtEl>
+                                </p:cBhvr>
+                              </p:animEffect>
+                            </p:childTnLst>
+                          </p:cTn>
+                        </p:par>
+                        <p:par>
+                          <p:cTn id="7" presetID="10" presetClass="entr" presetSubtype="0" fill="hold" nodeType="withEffect">
+                            <p:stCondLst>
+                              <p:cond delay="200"/>
+                            </p:stCondLst>
+                            <p:childTnLst>
+                              <p:animEffect transition="in" filter="fade">
+                                <p:cBhvr>
+                                  <p:cTn id="8" dur="450"/>
+                                  <p:tgtEl>
+                                    <p:spTgt spid="4"/>
+                                  </p:tgtEl>
+                                </p:cBhvr>
+                              </p:animEffect>
+                            </p:childTnLst>
+                          </p:cTn>
+                        </p:par>
+                      </p:childTnLst>
+                    </p:cTn>
+                  </p:par>
+                </p:childTnLst>
+              </p:cTn>
+              <p:prevCondLst>
+                <p:cond evt="onPrev" delay="0">
+                  <p:tgtEl>
+                    <p:sldTgt/>
+                  </p:tgtEl>
+                </p:cond>
+              </p:prevCondLst>
+              <p:nextCondLst>
+                <p:cond evt="onNext" delay="0">
+                  <p:tgtEl>
+                    <p:sldTgt/>
+                  </p:tgtEl>
+                </p:cond>
+              </p:nextCondLst>
+            </p:seq>
+          </p:childTnLst>
+        </p:cTn>
+      </p:par>
+    </p:tnLst>
+  </p:timing>
 </p:sld>
 </file>
 
@@ -12034,6 +13024,96 @@
   <p:clrMapOvr>
     <a:masterClrMapping/>
   </p:clrMapOvr>
+  <p:timing>
+    <p:tnLst>
+      <p:par>
+        <p:cTn id="1" dur="indefinite" restart="never" nodeType="tmRoot">
+          <p:childTnLst>
+            <p:seq concurrent="true" nextAc="seek">
+              <p:cTn id="2" dur="indefinite" nodeType="mainSeq">
+                <p:childTnLst>
+                  <p:par>
+                    <p:cTn id="9" fill="hold">
+                      <p:stCondLst>
+                        <p:cond delay="0"/>
+                      </p:stCondLst>
+                      <p:childTnLst>
+                        <p:par>
+                          <p:cTn id="3" presetID="10" presetClass="entr" presetSubtype="0" fill="hold" nodeType="withEffect">
+                            <p:stCondLst>
+                              <p:cond delay="0"/>
+                            </p:stCondLst>
+                            <p:childTnLst>
+                              <p:animEffect transition="in" filter="fade">
+                                <p:cBhvr>
+                                  <p:cTn id="4" dur="450"/>
+                                  <p:tgtEl>
+                                    <p:spTgt spid="2"/>
+                                  </p:tgtEl>
+                                </p:cBhvr>
+                              </p:animEffect>
+                            </p:childTnLst>
+                          </p:cTn>
+                        </p:par>
+                        <p:par>
+                          <p:cTn id="5" presetID="10" presetClass="entr" presetSubtype="0" fill="hold" nodeType="withEffect">
+                            <p:stCondLst>
+                              <p:cond delay="200"/>
+                            </p:stCondLst>
+                            <p:childTnLst>
+                              <p:animEffect transition="in" filter="fade">
+                                <p:cBhvr>
+                                  <p:cTn id="6" dur="450"/>
+                                  <p:tgtEl>
+                                    <p:spTgt spid="3"/>
+                                  </p:tgtEl>
+                                </p:cBhvr>
+                              </p:animEffect>
+                            </p:childTnLst>
+                          </p:cTn>
+                        </p:par>
+                        <p:par>
+                          <p:cTn id="7" presetID="10" presetClass="entr" presetSubtype="0" fill="hold" nodeType="withEffect">
+                            <p:stCondLst>
+                              <p:cond delay="200"/>
+                            </p:stCondLst>
+                            <p:childTnLst>
+                              <p:animEffect transition="in" filter="fade">
+                                <p:cBhvr>
+                                  <p:cTn id="8" dur="450"/>
+                                  <p:tgtEl>
+                                    <p:spTgt spid="4"/>
+                                  </p:tgtEl>
+                                </p:cBhvr>
+                              </p:animEffect>
+                            </p:childTnLst>
+                          </p:cTn>
+                        </p:par>
+                      </p:childTnLst>
+                    </p:cTn>
+                  </p:par>
+                </p:childTnLst>
+              </p:cTn>
+              <p:prevCondLst>
+                <p:cond evt="onPrev" delay="0">
+                  <p:tgtEl>
+                    <p:sldTgt/>
+                  </p:tgtEl>
+                </p:cond>
+              </p:prevCondLst>
+              <p:nextCondLst>
+                <p:cond evt="onNext" delay="0">
+                  <p:tgtEl>
+                    <p:sldTgt/>
+                  </p:tgtEl>
+                </p:cond>
+              </p:nextCondLst>
+            </p:seq>
+          </p:childTnLst>
+        </p:cTn>
+      </p:par>
+    </p:tnLst>
+  </p:timing>
 </p:sld>
 </file>
 
